--- a/Semantic-Search-to-Moment-Search.pptx
+++ b/Semantic-Search-to-Moment-Search.pptx
@@ -3503,7 +3503,7 @@
                 </a:solidFill>
                 <a:latin typeface="Calibri"/>
               </a:rPr>
-              <a:t>Muthukumar Selvarasu   ·   Software Engineer</a:t>
+              <a:t>Muthukumar Selvarasu   ·   FDE Platform Engineer</a:t>
             </a:r>
           </a:p>
         </p:txBody>
@@ -4730,7 +4730,7 @@
         </p:nvGraphicFramePr>
         <p:xfrm>
           <a:off x="502920" y="1371600"/>
-          <a:ext cx="11155680" cy="3246120"/>
+          <a:ext cx="11155680" cy="2788920"/>
         </p:xfrm>
         <a:graphic>
           <a:graphicData uri="http://schemas.openxmlformats.org/drawingml/2006/table">
@@ -4968,8 +4968,8 @@
         </p:nvSpPr>
         <p:spPr>
           <a:xfrm>
-            <a:off x="502920" y="4800600"/>
-            <a:ext cx="11155680" cy="640080"/>
+            <a:off x="502920" y="4224528"/>
+            <a:ext cx="11155680" cy="530352"/>
           </a:xfrm>
           <a:prstGeom prst="rect">
             <a:avLst/>
@@ -4993,39 +4993,30 @@
           </a:p>
         </p:txBody>
       </p:sp>
-      <p:sp>
-        <p:nvSpPr>
-          <p:cNvPr id="12" name="TextBox 11"/>
-          <p:cNvSpPr txBox="1"/>
+      <p:pic>
+        <p:nvPicPr>
+          <p:cNvPr id="12" name="Picture 11" descr="scorecard.png"/>
+          <p:cNvPicPr>
+            <a:picLocks noChangeAspect="1"/>
+          </p:cNvPicPr>
           <p:nvPr/>
-        </p:nvSpPr>
-        <p:spPr>
-          <a:xfrm>
-            <a:off x="502920" y="5623560"/>
-            <a:ext cx="11155680" cy="411480"/>
+        </p:nvPicPr>
+        <p:blipFill>
+          <a:blip r:embed="rId3"/>
+          <a:stretch>
+            <a:fillRect/>
+          </a:stretch>
+        </p:blipFill>
+        <p:spPr>
+          <a:xfrm>
+            <a:off x="502920" y="4818888"/>
+            <a:ext cx="6466232" cy="1691640"/>
           </a:xfrm>
           <a:prstGeom prst="rect">
             <a:avLst/>
           </a:prstGeom>
-          <a:noFill/>
-        </p:spPr>
-        <p:txBody>
-          <a:bodyPr wrap="square" lIns="0" rIns="0" tIns="0" bIns="0"/>
-          <a:lstStyle/>
-          <a:p>
-            <a:pPr algn="l"/>
-            <a:r>
-              <a:rPr sz="1800" b="1">
-                <a:solidFill>
-                  <a:srgbClr val="14283C"/>
-                </a:solidFill>
-                <a:latin typeface="Calibri"/>
-              </a:rPr>
-              <a:t>Q1 is tied on details, with a cleaner span.    Q2 is 1/3 for the moment and 0/3 for the baseline.</a:t>
-            </a:r>
-          </a:p>
-        </p:txBody>
-      </p:sp>
+        </p:spPr>
+      </p:pic>
     </p:spTree>
   </p:cSld>
   <p:clrMapOvr>
